--- a/pre.pptx
+++ b/pre.pptx
@@ -1006,8 +1006,8 @@
         </p:nvSpPr>
         <p:spPr>
           <a:xfrm>
-            <a:off x="1143225" y="685800"/>
-            <a:ext cx="4572225" cy="3429000"/>
+            <a:off x="381000" y="685800"/>
+            <a:ext cx="6096000" cy="3429000"/>
           </a:xfrm>
           <a:custGeom>
             <a:avLst/>
@@ -12413,7 +12413,7 @@
               <a:buNone/>
             </a:pPr>
             <a:r>
-              <a:rPr lang="en-US" sz="1500" b="1" i="0" u="none" strike="noStrike" cap="none">
+              <a:rPr lang="en-US" sz="1500" b="1" i="0" u="none" strike="noStrike" cap="none" dirty="0">
                 <a:solidFill>
                   <a:srgbClr val="F8FAFC"/>
                 </a:solidFill>
@@ -12425,7 +12425,7 @@
               <a:t>Advanced Update Logic:</a:t>
             </a:r>
             <a:r>
-              <a:rPr lang="en-US" sz="1500" b="0" i="0" u="none" strike="noStrike" cap="none">
+              <a:rPr lang="en-US" sz="1500" b="0" i="0" u="none" strike="noStrike" cap="none" dirty="0">
                 <a:solidFill>
                   <a:srgbClr val="CBD5E1"/>
                 </a:solidFill>
@@ -12436,7 +12436,7 @@
               </a:rPr>
               <a:t> Programmatically differentiated between full resource replacement (PUT mandates all fields) and partial modification (PATCH allows selective updates).</a:t>
             </a:r>
-            <a:endParaRPr/>
+            <a:endParaRPr lang="en-US" dirty="0"/>
           </a:p>
         </p:txBody>
       </p:sp>
@@ -12478,7 +12478,7 @@
               <a:buNone/>
             </a:pPr>
             <a:r>
-              <a:rPr lang="en-US" sz="1500" b="1" i="0" u="none" strike="noStrike" cap="none">
+              <a:rPr lang="en-US" sz="1500" b="1" i="0" u="none" strike="noStrike" cap="none" dirty="0">
                 <a:solidFill>
                   <a:srgbClr val="F8FAFC"/>
                 </a:solidFill>
@@ -12490,7 +12490,7 @@
               <a:t>Delete:</a:t>
             </a:r>
             <a:r>
-              <a:rPr lang="en-US" sz="1500" b="0" i="0" u="none" strike="noStrike" cap="none">
+              <a:rPr lang="en-US" sz="1500" b="0" i="0" u="none" strike="noStrike" cap="none" dirty="0">
                 <a:solidFill>
                   <a:srgbClr val="CBD5E1"/>
                 </a:solidFill>
@@ -12501,7 +12501,7 @@
               </a:rPr>
               <a:t> Securely removes designated resources via the DELETE method.</a:t>
             </a:r>
-            <a:endParaRPr/>
+            <a:endParaRPr dirty="0"/>
           </a:p>
         </p:txBody>
       </p:sp>
